--- a/Spotify_SQL_Analysis_Organized_Reya_Mondal.pptx
+++ b/Spotify_SQL_Analysis_Organized_Reya_Mondal.pptx
@@ -7633,7 +7633,7 @@
         </p:nvSpPr>
         <p:spPr>
           <a:xfrm>
-            <a:off x="0" y="0"/>
+            <a:off x="15766" y="0"/>
             <a:ext cx="12191695" cy="6858000"/>
           </a:xfrm>
           <a:prstGeom prst="rect">
